--- a/tests/report_generator/integration/references/reference_system-maintainability-one-pager.pptx
+++ b/tests/report_generator/integration/references/reference_system-maintainability-one-pager.pptx
@@ -20856,7 +20856,7 @@
           <a:p>
             <a:r>
               <a:rPr lang="en-US"/>
-              <a:t>Maintainability report for Integrationtest-kafka for the period 2026-01-11 and 2026-03-8</a:t>
+              <a:t>Maintainability report for Integrationtest-kafka for the period 2026-01-11 and 2026-03-08</a:t>
             </a:r>
             <a:endParaRPr lang="en-US"/>
           </a:p>

--- a/tests/report_generator/integration/references/reference_system-maintainability-one-pager.pptx
+++ b/tests/report_generator/integration/references/reference_system-maintainability-one-pager.pptx
@@ -20856,7 +20856,7 @@
           <a:p>
             <a:r>
               <a:rPr lang="en-US"/>
-              <a:t>Maintainability report for Integrationtest-kafka for the period 2026-01-11 and 2026-03-08</a:t>
+              <a:t>Maintainability report for Integrationtest-kafka for the period 11 January 2026 and 8 March 2026</a:t>
             </a:r>
             <a:endParaRPr lang="en-US"/>
           </a:p>

--- a/tests/report_generator/integration/references/reference_system-maintainability-one-pager.pptx
+++ b/tests/report_generator/integration/references/reference_system-maintainability-one-pager.pptx
@@ -21266,7 +21266,7 @@
                           <a:ea typeface="ＭＳ Ｐゴシック" charset="0"/>
                           <a:cs typeface="TheSans B7 Bold"/>
                         </a:rPr>
-                        <a:t>★★☆☆☆</a:t>
+                        <a:t/>
                       </a:r>
                       <a:endParaRPr kumimoji="0" lang="en-US" sz="1200" b="0" i="0" u="none" strike="noStrike" cap="none" normalizeH="0" baseline="0" noProof="0" dirty="0">
                         <a:ln>
@@ -21357,7 +21357,7 @@
                           <a:ea typeface="ＭＳ Ｐゴシック" charset="0"/>
                           <a:cs typeface="TheSans B7 Bold"/>
                         </a:rPr>
-                        <a:t>2.1</a:t>
+                        <a:t>N/A</a:t>
                       </a:r>
                       <a:endParaRPr kumimoji="0" lang="en-US" sz="1400" b="0" i="0" u="none" strike="noStrike" cap="none" normalizeH="0" baseline="0" noProof="0" dirty="0">
                         <a:ln>
@@ -21427,7 +21427,7 @@
                           <a:effectLst/>
                           <a:latin typeface="Calibri Regular"/>
                         </a:rPr>
-                        <a:t>=</a:t>
+                        <a:t/>
                       </a:r>
                     </a:p>
                   </a:txBody>
@@ -21689,7 +21689,7 @@
                           <a:ea typeface="ＭＳ Ｐゴシック" charset="0"/>
                           <a:cs typeface="TheSans B7 Bold"/>
                         </a:rPr>
-                        <a:t>3.5</a:t>
+                        <a:t>3.6</a:t>
                       </a:r>
                       <a:endParaRPr kumimoji="0" lang="en-US" sz="1400" b="0" i="0" u="none" strike="noStrike" cap="none" normalizeH="0" baseline="0" noProof="0" dirty="0">
                         <a:ln>
@@ -22046,7 +22046,7 @@
                           <a:ea typeface="ＭＳ Ｐゴシック" charset="0"/>
                           <a:cs typeface="TheSans B7 Bold"/>
                         </a:rPr>
-                        <a:t>3.3</a:t>
+                        <a:t>3.4</a:t>
                       </a:r>
                       <a:endParaRPr kumimoji="0" lang="en-US" sz="1400" b="0" i="0" u="none" strike="noStrike" cap="none" normalizeH="0" baseline="0" noProof="0" dirty="0">
                         <a:ln>
@@ -22403,7 +22403,7 @@
                           <a:ea typeface="ＭＳ Ｐゴシック" charset="0"/>
                           <a:cs typeface="TheSans B7 Bold"/>
                         </a:rPr>
-                        <a:t>3.0</a:t>
+                        <a:t>3.1</a:t>
                       </a:r>
                       <a:endParaRPr kumimoji="0" lang="en-US" sz="1400" b="0" i="0" u="none" strike="noStrike" cap="none" normalizeH="0" baseline="0" noProof="0" dirty="0">
                         <a:ln>
@@ -23474,7 +23474,7 @@
                           <a:ea typeface="ＭＳ Ｐゴシック" charset="0"/>
                           <a:cs typeface="TheSans B7 Bold"/>
                         </a:rPr>
-                        <a:t>2.3</a:t>
+                        <a:t>2.2</a:t>
                       </a:r>
                       <a:endParaRPr kumimoji="0" lang="en-US" sz="1400" b="0" i="0" u="none" strike="noStrike" cap="none" normalizeH="0" baseline="0" noProof="0" dirty="0">
                         <a:ln>
@@ -24935,7 +24935,7 @@
                           <a:ea typeface="ＭＳ Ｐゴシック" charset="0"/>
                           <a:cs typeface="TheSans B7 Bold"/>
                         </a:rPr>
-                        <a:t>4.1</a:t>
+                        <a:t>3.5</a:t>
                       </a:r>
                       <a:endParaRPr kumimoji="0" lang="en-US" sz="1400" b="0" i="0" u="none" strike="noStrike" cap="none" normalizeH="0" baseline="0" noProof="0" dirty="0">
                         <a:ln>
